--- a/Agile_Dev_Assist_Presentation.pptx
+++ b/Agile_Dev_Assist_Presentation.pptx
@@ -6,9 +6,11 @@
   </p:sldMasterIdLst>
   <p:sldIdLst>
     <p:sldId id="256" r:id="rId2"/>
+    <p:sldId id="280" r:id="rId31"/>
     <p:sldId id="257" r:id="rId3"/>
     <p:sldId id="258" r:id="rId4"/>
     <p:sldId id="259" r:id="rId5"/>
+    <p:sldId id="281" r:id="rId32"/>
     <p:sldId id="260" r:id="rId6"/>
     <p:sldId id="261" r:id="rId7"/>
     <p:sldId id="262" r:id="rId8"/>
@@ -26,6 +28,7 @@
     <p:sldId id="274" r:id="rId20"/>
     <p:sldId id="275" r:id="rId21"/>
     <p:sldId id="276" r:id="rId22"/>
+    <p:sldId id="282" r:id="rId33"/>
     <p:sldId id="277" r:id="rId23"/>
     <p:sldId id="278" r:id="rId24"/>
     <p:sldId id="279" r:id="rId25"/>
@@ -18998,6 +19001,931 @@
               <a:buNone/>
             </a:pPr>
             <a:endParaRPr lang="en-US" sz="2000" dirty="0"/>
+          </a:p>
+        </p:txBody>
+      </p:sp>
+    </p:spTree>
+  </p:cSld>
+  <p:clrMapOvr>
+    <a:masterClrMapping/>
+  </p:clrMapOvr>
+</p:sld>
+</file>
+
+<file path=ppt/slides/slide25.xml><?xml version="1.0" encoding="utf-8"?>
+<p:sld xmlns:a="http://schemas.openxmlformats.org/drawingml/2006/main" xmlns:p="http://schemas.openxmlformats.org/presentationml/2006/main" xmlns:r="http://schemas.openxmlformats.org/officeDocument/2006/relationships">
+  <p:cSld>
+    <p:spTree>
+      <p:nvGrpSpPr>
+        <p:cNvPr id="1" name=""/>
+        <p:cNvGrpSpPr/>
+        <p:nvPr/>
+      </p:nvGrpSpPr>
+      <p:grpSpPr/>
+      <p:sp>
+        <p:nvSpPr>
+          <p:cNvPr id="2" name="Title 1"/>
+          <p:cNvSpPr>
+            <a:spLocks noGrp="1"/>
+          </p:cNvSpPr>
+          <p:nvPr>
+            <p:ph type="title" idx="100"/>
+          </p:nvPr>
+        </p:nvSpPr>
+        <p:spPr/>
+        <p:txBody>
+          <a:bodyPr/>
+          <a:lstStyle/>
+          <a:p>
+            <a:r>
+              <a:rPr b="1" sz="3000">
+                <a:solidFill>
+                  <a:srgbClr val="1B1F3B"/>
+                </a:solidFill>
+              </a:rPr>
+              <a:t>Why, for whom, what changes – on one page</a:t>
+            </a:r>
+          </a:p>
+        </p:txBody>
+      </p:sp>
+      <p:graphicFrame>
+        <p:nvGraphicFramePr>
+          <p:cNvPr id="3" name="Table 2"/>
+          <p:cNvGraphicFramePr>
+            <a:graphicFrameLocks noGrp="1"/>
+          </p:cNvGraphicFramePr>
+          <p:nvPr/>
+        </p:nvGraphicFramePr>
+        <p:xfrm>
+          <a:off x="640080" y="1371600"/>
+          <a:ext cx="10972800" cy="4571994"/>
+        </p:xfrm>
+        <a:graphic>
+          <a:graphicData uri="http://schemas.openxmlformats.org/drawingml/2006/table">
+            <a:tbl>
+              <a:tblPr firstRow="0" bandRow="0">
+                <a:tableStyleId>{5C22544A-7EE6-4342-B048-85BDC9FD1C3A}</a:tableStyleId>
+              </a:tblPr>
+              <a:tblGrid>
+                <a:gridCol w="1920240"/>
+                <a:gridCol w="9052560"/>
+              </a:tblGrid>
+              <a:tr h="653142">
+                <a:tc>
+                  <a:txBody>
+                    <a:bodyPr/>
+                    <a:lstStyle/>
+                    <a:p>
+                      <a:r>
+                        <a:rPr b="1" sz="1400">
+                          <a:solidFill>
+                            <a:srgbClr val="6C5CE7"/>
+                          </a:solidFill>
+                        </a:rPr>
+                        <a:t>The problem</a:t>
+                      </a:r>
+                    </a:p>
+                  </a:txBody>
+                  <a:tcPr marL="137160" marR="137160" marT="45720" marB="45720" anchor="ctr">
+                    <a:solidFill>
+                      <a:srgbClr val="F1F2F8"/>
+                    </a:solidFill>
+                  </a:tcPr>
+                </a:tc>
+                <a:tc>
+                  <a:txBody>
+                    <a:bodyPr/>
+                    <a:lstStyle/>
+                    <a:p>
+                      <a:r>
+                        <a:rPr sz="1250">
+                          <a:solidFill>
+                            <a:srgbClr val="1B1F3B"/>
+                          </a:solidFill>
+                        </a:rPr>
+                        <a:t>Most of the time on a story goes into finding out how our code wants things done (which folder, which file to copy, where to register, which grant to add) – not into the logic itself. Misses show up late, in review or production.</a:t>
+                      </a:r>
+                    </a:p>
+                  </a:txBody>
+                  <a:tcPr marL="137160" marR="137160" marT="45720" marB="45720" anchor="ctr">
+                    <a:solidFill>
+                      <a:srgbClr val="F1F2F8"/>
+                    </a:solidFill>
+                  </a:tcPr>
+                </a:tc>
+              </a:tr>
+              <a:tr h="653142">
+                <a:tc>
+                  <a:txBody>
+                    <a:bodyPr/>
+                    <a:lstStyle/>
+                    <a:p>
+                      <a:r>
+                        <a:rPr b="1" sz="1400">
+                          <a:solidFill>
+                            <a:srgbClr val="6C5CE7"/>
+                          </a:solidFill>
+                        </a:rPr>
+                        <a:t>Who it is for</a:t>
+                      </a:r>
+                    </a:p>
+                  </a:txBody>
+                  <a:tcPr marL="137160" marR="137160" marT="45720" marB="45720" anchor="ctr">
+                    <a:solidFill>
+                      <a:srgbClr val="FFFFFF"/>
+                    </a:solidFill>
+                  </a:tcPr>
+                </a:tc>
+                <a:tc>
+                  <a:txBody>
+                    <a:bodyPr/>
+                    <a:lstStyle/>
+                    <a:p>
+                      <a:r>
+                        <a:rPr sz="1250">
+                          <a:solidFill>
+                            <a:srgbClr val="1B1F3B"/>
+                          </a:solidFill>
+                        </a:rPr>
+                        <a:t>The developers who build IKG, ODM and NLG; then reviewers, new joiners, story writers and the people responsible for standards.</a:t>
+                      </a:r>
+                    </a:p>
+                  </a:txBody>
+                  <a:tcPr marL="137160" marR="137160" marT="45720" marB="45720" anchor="ctr">
+                    <a:solidFill>
+                      <a:srgbClr val="FFFFFF"/>
+                    </a:solidFill>
+                  </a:tcPr>
+                </a:tc>
+              </a:tr>
+              <a:tr h="653142">
+                <a:tc>
+                  <a:txBody>
+                    <a:bodyPr/>
+                    <a:lstStyle/>
+                    <a:p>
+                      <a:r>
+                        <a:rPr b="1" sz="1400">
+                          <a:solidFill>
+                            <a:srgbClr val="6C5CE7"/>
+                          </a:solidFill>
+                        </a:rPr>
+                        <a:t>What we built</a:t>
+                      </a:r>
+                    </a:p>
+                  </a:txBody>
+                  <a:tcPr marL="137160" marR="137160" marT="45720" marB="45720" anchor="ctr">
+                    <a:solidFill>
+                      <a:srgbClr val="F1F2F8"/>
+                    </a:solidFill>
+                  </a:tcPr>
+                </a:tc>
+                <a:tc>
+                  <a:txBody>
+                    <a:bodyPr/>
+                    <a:lstStyle/>
+                    <a:p>
+                      <a:r>
+                        <a:rPr sz="1250">
+                          <a:solidFill>
+                            <a:srgbClr val="1B1F3B"/>
+                          </a:solidFill>
+                        </a:rPr>
+                        <a:t>Knowledge Pack: a context pack with the folders, files, tables, rules and conventions of each system. Dev Assistant: a tool where you attach a story, press Run, and get the plan, the files, a check report and a review – then push it to GitLab under your own name.</a:t>
+                      </a:r>
+                    </a:p>
+                  </a:txBody>
+                  <a:tcPr marL="137160" marR="137160" marT="45720" marB="45720" anchor="ctr">
+                    <a:solidFill>
+                      <a:srgbClr val="F1F2F8"/>
+                    </a:solidFill>
+                  </a:tcPr>
+                </a:tc>
+              </a:tr>
+              <a:tr h="653142">
+                <a:tc>
+                  <a:txBody>
+                    <a:bodyPr/>
+                    <a:lstStyle/>
+                    <a:p>
+                      <a:r>
+                        <a:rPr b="1" sz="1400">
+                          <a:solidFill>
+                            <a:srgbClr val="6C5CE7"/>
+                          </a:solidFill>
+                        </a:rPr>
+                        <a:t>What changes</a:t>
+                      </a:r>
+                    </a:p>
+                  </a:txBody>
+                  <a:tcPr marL="137160" marR="137160" marT="45720" marB="45720" anchor="ctr">
+                    <a:solidFill>
+                      <a:srgbClr val="FFFFFF"/>
+                    </a:solidFill>
+                  </a:tcPr>
+                </a:tc>
+                <a:tc>
+                  <a:txBody>
+                    <a:bodyPr/>
+                    <a:lstStyle/>
+                    <a:p>
+                      <a:r>
+                        <a:rPr sz="1250">
+                          <a:solidFill>
+                            <a:srgbClr val="1B1F3B"/>
+                          </a:solidFill>
+                        </a:rPr>
+                        <a:t>A routine story goes from 2–4 days to the same day. Mechanical mistakes are caught before the code is sent for review. Standards are checked on every file, every time. The knowledge stays current and does not leave with people.</a:t>
+                      </a:r>
+                    </a:p>
+                  </a:txBody>
+                  <a:tcPr marL="137160" marR="137160" marT="45720" marB="45720" anchor="ctr">
+                    <a:solidFill>
+                      <a:srgbClr val="FFFFFF"/>
+                    </a:solidFill>
+                  </a:tcPr>
+                </a:tc>
+              </a:tr>
+              <a:tr h="653142">
+                <a:tc>
+                  <a:txBody>
+                    <a:bodyPr/>
+                    <a:lstStyle/>
+                    <a:p>
+                      <a:r>
+                        <a:rPr b="1" sz="1400">
+                          <a:solidFill>
+                            <a:srgbClr val="6C5CE7"/>
+                          </a:solidFill>
+                        </a:rPr>
+                        <a:t>Proof so far</a:t>
+                      </a:r>
+                    </a:p>
+                  </a:txBody>
+                  <a:tcPr marL="137160" marR="137160" marT="45720" marB="45720" anchor="ctr">
+                    <a:solidFill>
+                      <a:srgbClr val="F1F2F8"/>
+                    </a:solidFill>
+                  </a:tcPr>
+                </a:tc>
+                <a:tc>
+                  <a:txBody>
+                    <a:bodyPr/>
+                    <a:lstStyle/>
+                    <a:p>
+                      <a:r>
+                        <a:rPr sz="1250">
+                          <a:solidFill>
+                            <a:srgbClr val="1B1F3B"/>
+                          </a:solidFill>
+                        </a:rPr>
+                        <a:t>Two real stories: code files generated in a few minutes, for under USD 2 each in token usage, with the mechanical parts right and only business questions left open.</a:t>
+                      </a:r>
+                    </a:p>
+                  </a:txBody>
+                  <a:tcPr marL="137160" marR="137160" marT="45720" marB="45720" anchor="ctr">
+                    <a:solidFill>
+                      <a:srgbClr val="F1F2F8"/>
+                    </a:solidFill>
+                  </a:tcPr>
+                </a:tc>
+              </a:tr>
+              <a:tr h="653142">
+                <a:tc>
+                  <a:txBody>
+                    <a:bodyPr/>
+                    <a:lstStyle/>
+                    <a:p>
+                      <a:r>
+                        <a:rPr b="1" sz="1400">
+                          <a:solidFill>
+                            <a:srgbClr val="6C5CE7"/>
+                          </a:solidFill>
+                        </a:rPr>
+                        <a:t>Guardrails</a:t>
+                      </a:r>
+                    </a:p>
+                  </a:txBody>
+                  <a:tcPr marL="137160" marR="137160" marT="45720" marB="45720" anchor="ctr">
+                    <a:solidFill>
+                      <a:srgbClr val="FFFFFF"/>
+                    </a:solidFill>
+                  </a:tcPr>
+                </a:tc>
+                <a:tc>
+                  <a:txBody>
+                    <a:bodyPr/>
+                    <a:lstStyle/>
+                    <a:p>
+                      <a:r>
+                        <a:rPr sz="1250">
+                          <a:solidFill>
+                            <a:srgbClr val="1B1F3B"/>
+                          </a:solidFill>
+                        </a:rPr>
+                        <a:t>It never merges anything itself; it never rewrites your existing files blindly; it shows exactly which files, tables and rules it used; every branch and commit carries the developer's name; no secrets stored on disk.</a:t>
+                      </a:r>
+                    </a:p>
+                  </a:txBody>
+                  <a:tcPr marL="137160" marR="137160" marT="45720" marB="45720" anchor="ctr">
+                    <a:solidFill>
+                      <a:srgbClr val="FFFFFF"/>
+                    </a:solidFill>
+                  </a:tcPr>
+                </a:tc>
+              </a:tr>
+              <a:tr h="653142">
+                <a:tc>
+                  <a:txBody>
+                    <a:bodyPr/>
+                    <a:lstStyle/>
+                    <a:p>
+                      <a:r>
+                        <a:rPr b="1" sz="1400">
+                          <a:solidFill>
+                            <a:srgbClr val="6C5CE7"/>
+                          </a:solidFill>
+                        </a:rPr>
+                        <a:t>What we ask</a:t>
+                      </a:r>
+                    </a:p>
+                  </a:txBody>
+                  <a:tcPr marL="137160" marR="137160" marT="45720" marB="45720" anchor="ctr">
+                    <a:solidFill>
+                      <a:srgbClr val="F1F2F8"/>
+                    </a:solidFill>
+                  </a:tcPr>
+                </a:tc>
+                <a:tc>
+                  <a:txBody>
+                    <a:bodyPr/>
+                    <a:lstStyle/>
+                    <a:p>
+                      <a:r>
+                        <a:rPr sz="1250">
+                          <a:solidFill>
+                            <a:srgbClr val="1B1F3B"/>
+                          </a:solidFill>
+                        </a:rPr>
+                        <a:t>Write stories that name the tables and columns; keep the knowledge file current; review the result the way you review any merge request.</a:t>
+                      </a:r>
+                    </a:p>
+                  </a:txBody>
+                  <a:tcPr marL="137160" marR="137160" marT="45720" marB="45720" anchor="ctr">
+                    <a:solidFill>
+                      <a:srgbClr val="F1F2F8"/>
+                    </a:solidFill>
+                  </a:tcPr>
+                </a:tc>
+              </a:tr>
+            </a:tbl>
+          </a:graphicData>
+        </a:graphic>
+      </p:graphicFrame>
+      <p:sp>
+        <p:nvSpPr>
+          <p:cNvPr id="4" name="TextBox 3"/>
+          <p:cNvSpPr txBox="1"/>
+          <p:nvPr/>
+        </p:nvSpPr>
+        <p:spPr>
+          <a:xfrm>
+            <a:off x="640080" y="6035040"/>
+            <a:ext cx="10972800" cy="365760"/>
+          </a:xfrm>
+          <a:prstGeom prst="rect">
+            <a:avLst/>
+          </a:prstGeom>
+          <a:noFill/>
+        </p:spPr>
+        <p:txBody>
+          <a:bodyPr wrap="square">
+            <a:spAutoFit/>
+          </a:bodyPr>
+          <a:lstStyle/>
+          <a:p>
+            <a:r>
+              <a:rPr sz="1250" i="1">
+                <a:solidFill>
+                  <a:srgbClr val="6C5CE7"/>
+                </a:solidFill>
+              </a:rPr>
+              <a:t>Days of convention-finding become minutes; the developer keeps the pen and the merge button.</a:t>
+            </a:r>
+          </a:p>
+        </p:txBody>
+      </p:sp>
+    </p:spTree>
+  </p:cSld>
+  <p:clrMapOvr>
+    <a:masterClrMapping/>
+  </p:clrMapOvr>
+</p:sld>
+</file>
+
+<file path=ppt/slides/slide26.xml><?xml version="1.0" encoding="utf-8"?>
+<p:sld xmlns:a="http://schemas.openxmlformats.org/drawingml/2006/main" xmlns:p="http://schemas.openxmlformats.org/presentationml/2006/main" xmlns:r="http://schemas.openxmlformats.org/officeDocument/2006/relationships">
+  <p:cSld>
+    <p:spTree>
+      <p:nvGrpSpPr>
+        <p:cNvPr id="1" name=""/>
+        <p:cNvGrpSpPr/>
+        <p:nvPr/>
+      </p:nvGrpSpPr>
+      <p:grpSpPr/>
+      <p:sp>
+        <p:nvSpPr>
+          <p:cNvPr id="2" name="Title 1"/>
+          <p:cNvSpPr>
+            <a:spLocks noGrp="1"/>
+          </p:cNvSpPr>
+          <p:nvPr>
+            <p:ph type="title" idx="100"/>
+          </p:nvPr>
+        </p:nvSpPr>
+        <p:spPr/>
+        <p:txBody>
+          <a:bodyPr/>
+          <a:lstStyle/>
+          <a:p>
+            <a:r>
+              <a:rPr b="1" sz="3000">
+                <a:solidFill>
+                  <a:srgbClr val="1B1F3B"/>
+                </a:solidFill>
+              </a:rPr>
+              <a:t>How the two parts fit: the context pack and the assistant</a:t>
+            </a:r>
+          </a:p>
+        </p:txBody>
+      </p:sp>
+      <p:pic>
+        <p:nvPicPr>
+          <p:cNvPr id="3" name="Picture 2" descr="pitch_diagram.png"/>
+          <p:cNvPicPr>
+            <a:picLocks noChangeAspect="1"/>
+          </p:cNvPicPr>
+          <p:nvPr/>
+        </p:nvPicPr>
+        <p:blipFill>
+          <a:blip r:embed="rId2"/>
+          <a:stretch>
+            <a:fillRect/>
+          </a:stretch>
+        </p:blipFill>
+        <p:spPr>
+          <a:xfrm>
+            <a:off x="640080" y="1371600"/>
+            <a:ext cx="5269955" cy="4572000"/>
+          </a:xfrm>
+          <a:prstGeom prst="rect">
+            <a:avLst/>
+          </a:prstGeom>
+        </p:spPr>
+      </p:pic>
+      <p:sp>
+        <p:nvSpPr>
+          <p:cNvPr id="4" name="Rectangle 3"/>
+          <p:cNvSpPr/>
+          <p:nvPr/>
+        </p:nvSpPr>
+        <p:spPr>
+          <a:xfrm>
+            <a:off x="6184355" y="1371600"/>
+            <a:ext cx="5428525" cy="4572000"/>
+          </a:xfrm>
+          <a:prstGeom prst="rect">
+            <a:avLst/>
+          </a:prstGeom>
+          <a:solidFill>
+            <a:srgbClr val="F1F2F8"/>
+          </a:solidFill>
+          <a:ln>
+            <a:noFill/>
+          </a:ln>
+          <a:effectLst/>
+        </p:spPr>
+        <p:style>
+          <a:lnRef idx="1">
+            <a:schemeClr val="accent1"/>
+          </a:lnRef>
+          <a:fillRef idx="3">
+            <a:schemeClr val="accent1"/>
+          </a:fillRef>
+          <a:effectRef idx="2">
+            <a:schemeClr val="accent1"/>
+          </a:effectRef>
+          <a:fontRef idx="minor">
+            <a:schemeClr val="lt1"/>
+          </a:fontRef>
+        </p:style>
+        <p:txBody>
+          <a:bodyPr rtlCol="0" anchor="t" wrap="square" lIns="182880" rIns="182880" tIns="137160"/>
+          <a:lstStyle/>
+          <a:p>
+            <a:pPr algn="l">
+              <a:spcAft>
+                <a:spcPts val="900"/>
+              </a:spcAft>
+            </a:pPr>
+            <a:r>
+              <a:rPr b="1" sz="1300">
+                <a:solidFill>
+                  <a:srgbClr val="1B1F3B"/>
+                </a:solidFill>
+              </a:rPr>
+              <a:t>Inputs  </a:t>
+            </a:r>
+            <a:r>
+              <a:rPr sz="1200">
+                <a:solidFill>
+                  <a:srgbClr val="4A4F6B"/>
+                </a:solidFill>
+              </a:rPr>
+              <a:t>the three code repositories, the Greenplum tables and the team's notes and rules</a:t>
+            </a:r>
+          </a:p>
+          <a:p>
+            <a:pPr algn="l">
+              <a:spcAft>
+                <a:spcPts val="900"/>
+              </a:spcAft>
+            </a:pPr>
+            <a:r>
+              <a:rPr b="1" sz="1300">
+                <a:solidFill>
+                  <a:srgbClr val="1B1F3B"/>
+                </a:solidFill>
+              </a:rPr>
+              <a:t>Knowledge Pack builder  </a:t>
+            </a:r>
+            <a:r>
+              <a:rPr sz="1200">
+                <a:solidFill>
+                  <a:srgbClr val="4A4F6B"/>
+                </a:solidFill>
+              </a:rPr>
+              <a:t>a scheduled job collects the facts – folder purposes, registration and companion rules, naming, standards, search index – into one context pack per system and e-mails what changed</a:t>
+            </a:r>
+          </a:p>
+          <a:p>
+            <a:pPr algn="l">
+              <a:spcAft>
+                <a:spcPts val="900"/>
+              </a:spcAft>
+            </a:pPr>
+            <a:r>
+              <a:rPr b="1" sz="1300">
+                <a:solidFill>
+                  <a:srgbClr val="1B1F3B"/>
+                </a:solidFill>
+              </a:rPr>
+              <a:t>Dev Assistant  </a:t>
+            </a:r>
+            <a:r>
+              <a:rPr sz="1200">
+                <a:solidFill>
+                  <a:srgbClr val="4A4F6B"/>
+                </a:solidFill>
+              </a:rPr>
+              <a:t>combines the pack with the story: read → ground → plan → code → check, in about 5–10 minutes</a:t>
+            </a:r>
+          </a:p>
+          <a:p>
+            <a:pPr algn="l">
+              <a:spcAft>
+                <a:spcPts val="900"/>
+              </a:spcAft>
+            </a:pPr>
+            <a:r>
+              <a:rPr b="1" sz="1300">
+                <a:solidFill>
+                  <a:srgbClr val="1B1F3B"/>
+                </a:solidFill>
+              </a:rPr>
+              <a:t>Git  </a:t>
+            </a:r>
+            <a:r>
+              <a:rPr sz="1200">
+                <a:solidFill>
+                  <a:srgbClr val="4A4F6B"/>
+                </a:solidFill>
+              </a:rPr>
+              <a:t>feature branch, one commit per run, merge request – all in the developer's name</a:t>
+            </a:r>
+          </a:p>
+          <a:p>
+            <a:pPr algn="l">
+              <a:spcAft>
+                <a:spcPts val="900"/>
+              </a:spcAft>
+            </a:pPr>
+            <a:r>
+              <a:rPr b="1" sz="1300">
+                <a:solidFill>
+                  <a:srgbClr val="1B1F3B"/>
+                </a:solidFill>
+              </a:rPr>
+              <a:t>People decide  </a:t>
+            </a:r>
+            <a:r>
+              <a:rPr sz="1200">
+                <a:solidFill>
+                  <a:srgbClr val="4A4F6B"/>
+                </a:solidFill>
+              </a:rPr>
+              <a:t>a person reads the diff, tests it and merges; the tool never merges</a:t>
+            </a:r>
+          </a:p>
+        </p:txBody>
+      </p:sp>
+      <p:sp>
+        <p:nvSpPr>
+          <p:cNvPr id="5" name="TextBox 4"/>
+          <p:cNvSpPr txBox="1"/>
+          <p:nvPr/>
+        </p:nvSpPr>
+        <p:spPr>
+          <a:xfrm>
+            <a:off x="640080" y="6035040"/>
+            <a:ext cx="10972800" cy="365760"/>
+          </a:xfrm>
+          <a:prstGeom prst="rect">
+            <a:avLst/>
+          </a:prstGeom>
+          <a:noFill/>
+        </p:spPr>
+        <p:txBody>
+          <a:bodyPr wrap="square">
+            <a:spAutoFit/>
+          </a:bodyPr>
+          <a:lstStyle/>
+          <a:p>
+            <a:r>
+              <a:rPr sz="1250" i="1">
+                <a:solidFill>
+                  <a:srgbClr val="6C5CE7"/>
+                </a:solidFill>
+              </a:rPr>
+              <a:t>The pack holds what the assistant needs to know; the assistant does the routine work of a story; a person merges.</a:t>
+            </a:r>
+          </a:p>
+        </p:txBody>
+      </p:sp>
+    </p:spTree>
+  </p:cSld>
+  <p:clrMapOvr>
+    <a:masterClrMapping/>
+  </p:clrMapOvr>
+</p:sld>
+</file>
+
+<file path=ppt/slides/slide27.xml><?xml version="1.0" encoding="utf-8"?>
+<p:sld xmlns:a="http://schemas.openxmlformats.org/drawingml/2006/main" xmlns:p="http://schemas.openxmlformats.org/presentationml/2006/main" xmlns:r="http://schemas.openxmlformats.org/officeDocument/2006/relationships">
+  <p:cSld>
+    <p:spTree>
+      <p:nvGrpSpPr>
+        <p:cNvPr id="1" name=""/>
+        <p:cNvGrpSpPr/>
+        <p:nvPr/>
+      </p:nvGrpSpPr>
+      <p:grpSpPr/>
+      <p:sp>
+        <p:nvSpPr>
+          <p:cNvPr id="2" name="Title 1"/>
+          <p:cNvSpPr>
+            <a:spLocks noGrp="1"/>
+          </p:cNvSpPr>
+          <p:nvPr>
+            <p:ph type="title" idx="100"/>
+          </p:nvPr>
+        </p:nvSpPr>
+        <p:spPr/>
+        <p:txBody>
+          <a:bodyPr/>
+          <a:lstStyle/>
+          <a:p>
+            <a:r>
+              <a:rPr b="1" sz="3000">
+                <a:solidFill>
+                  <a:srgbClr val="1B1F3B"/>
+                </a:solidFill>
+              </a:rPr>
+              <a:t>Git: nothing reaches GitLab until Push and MR</a:t>
+            </a:r>
+          </a:p>
+        </p:txBody>
+      </p:sp>
+      <p:pic>
+        <p:nvPicPr>
+          <p:cNvPr id="3" name="Picture 2" descr="git_diagram.png"/>
+          <p:cNvPicPr>
+            <a:picLocks noChangeAspect="1"/>
+          </p:cNvPicPr>
+          <p:nvPr/>
+        </p:nvPicPr>
+        <p:blipFill>
+          <a:blip r:embed="rId2"/>
+          <a:stretch>
+            <a:fillRect/>
+          </a:stretch>
+        </p:blipFill>
+        <p:spPr>
+          <a:xfrm>
+            <a:off x="640080" y="1371600"/>
+            <a:ext cx="5466875" cy="4572000"/>
+          </a:xfrm>
+          <a:prstGeom prst="rect">
+            <a:avLst/>
+          </a:prstGeom>
+        </p:spPr>
+      </p:pic>
+      <p:sp>
+        <p:nvSpPr>
+          <p:cNvPr id="4" name="Rectangle 3"/>
+          <p:cNvSpPr/>
+          <p:nvPr/>
+        </p:nvSpPr>
+        <p:spPr>
+          <a:xfrm>
+            <a:off x="6381275" y="1371600"/>
+            <a:ext cx="5231605" cy="4572000"/>
+          </a:xfrm>
+          <a:prstGeom prst="rect">
+            <a:avLst/>
+          </a:prstGeom>
+          <a:solidFill>
+            <a:srgbClr val="F1F2F8"/>
+          </a:solidFill>
+          <a:ln>
+            <a:noFill/>
+          </a:ln>
+          <a:effectLst/>
+        </p:spPr>
+        <p:style>
+          <a:lnRef idx="1">
+            <a:schemeClr val="accent1"/>
+          </a:lnRef>
+          <a:fillRef idx="3">
+            <a:schemeClr val="accent1"/>
+          </a:fillRef>
+          <a:effectRef idx="2">
+            <a:schemeClr val="accent1"/>
+          </a:effectRef>
+          <a:fontRef idx="minor">
+            <a:schemeClr val="lt1"/>
+          </a:fontRef>
+        </p:style>
+        <p:txBody>
+          <a:bodyPr rtlCol="0" anchor="t" wrap="square" lIns="182880" rIns="182880" tIns="137160"/>
+          <a:lstStyle/>
+          <a:p>
+            <a:pPr algn="l">
+              <a:spcAft>
+                <a:spcPts val="900"/>
+              </a:spcAft>
+            </a:pPr>
+            <a:r>
+              <a:rPr b="1" sz="1300">
+                <a:solidFill>
+                  <a:srgbClr val="1B1F3B"/>
+                </a:solidFill>
+              </a:rPr>
+              <a:t>1 Feature branch  </a:t>
+            </a:r>
+            <a:r>
+              <a:rPr sz="1200">
+                <a:solidFill>
+                  <a:srgbClr val="4A4F6B"/>
+                </a:solidFill>
+              </a:rPr>
+              <a:t>created on the server, in this chat's private working copy, from the base branch; GitLab is only read</a:t>
+            </a:r>
+          </a:p>
+          <a:p>
+            <a:pPr algn="l">
+              <a:spcAft>
+                <a:spcPts val="900"/>
+              </a:spcAft>
+            </a:pPr>
+            <a:r>
+              <a:rPr b="1" sz="1300">
+                <a:solidFill>
+                  <a:srgbClr val="1B1F3B"/>
+                </a:solidFill>
+              </a:rPr>
+              <a:t>2–3 Runs and edits  </a:t>
+            </a:r>
+            <a:r>
+              <a:rPr sz="1200">
+                <a:solidFill>
+                  <a:srgbClr val="4A4F6B"/>
+                </a:solidFill>
+              </a:rPr>
+              <a:t>every run and change request is one commit in your name; hand edits are committed at push; nothing is pushed automatically</a:t>
+            </a:r>
+          </a:p>
+          <a:p>
+            <a:pPr algn="l">
+              <a:spcAft>
+                <a:spcPts val="900"/>
+              </a:spcAft>
+            </a:pPr>
+            <a:r>
+              <a:rPr b="1" sz="1300">
+                <a:solidFill>
+                  <a:srgbClr val="1B1F3B"/>
+                </a:solidFill>
+              </a:rPr>
+              <a:t>4 Push and MR  </a:t>
+            </a:r>
+            <a:r>
+              <a:rPr sz="1200">
+                <a:solidFill>
+                  <a:srgbClr val="4A4F6B"/>
+                </a:solidFill>
+              </a:rPr>
+              <a:t>with your own token: rebase on the base branch, your name on every commit, push with lease (never overwrites a colleague's work)</a:t>
+            </a:r>
+          </a:p>
+          <a:p>
+            <a:pPr algn="l">
+              <a:spcAft>
+                <a:spcPts val="900"/>
+              </a:spcAft>
+            </a:pPr>
+            <a:r>
+              <a:rPr b="1" sz="1300">
+                <a:solidFill>
+                  <a:srgbClr val="1B1F3B"/>
+                </a:solidFill>
+              </a:rPr>
+              <a:t>5 Merge request  </a:t>
+            </a:r>
+            <a:r>
+              <a:rPr sz="1200">
+                <a:solidFill>
+                  <a:srgbClr val="4A4F6B"/>
+                </a:solidFill>
+              </a:rPr>
+              <a:t>opened in your name into the target branch, with the story, files and scores; conflicts with the target are previewed</a:t>
+            </a:r>
+          </a:p>
+          <a:p>
+            <a:pPr algn="l">
+              <a:spcAft>
+                <a:spcPts val="900"/>
+              </a:spcAft>
+            </a:pPr>
+            <a:r>
+              <a:rPr b="1" sz="1300">
+                <a:solidFill>
+                  <a:srgbClr val="1B1F3B"/>
+                </a:solidFill>
+              </a:rPr>
+              <a:t>Isolation  </a:t>
+            </a:r>
+            <a:r>
+              <a:rPr sz="1200">
+                <a:solidFill>
+                  <a:srgbClr val="4A4F6B"/>
+                </a:solidFill>
+              </a:rPr>
+              <a:t>one shared read-only mirror per repository; one working copy and branch per chat; your token, your permissions</a:t>
+            </a:r>
+          </a:p>
+        </p:txBody>
+      </p:sp>
+      <p:sp>
+        <p:nvSpPr>
+          <p:cNvPr id="5" name="TextBox 4"/>
+          <p:cNvSpPr txBox="1"/>
+          <p:nvPr/>
+        </p:nvSpPr>
+        <p:spPr>
+          <a:xfrm>
+            <a:off x="640080" y="6035040"/>
+            <a:ext cx="10972800" cy="365760"/>
+          </a:xfrm>
+          <a:prstGeom prst="rect">
+            <a:avLst/>
+          </a:prstGeom>
+          <a:noFill/>
+        </p:spPr>
+        <p:txBody>
+          <a:bodyPr wrap="square">
+            <a:spAutoFit/>
+          </a:bodyPr>
+          <a:lstStyle/>
+          <a:p>
+            <a:r>
+              <a:rPr sz="1250" i="1">
+                <a:solidFill>
+                  <a:srgbClr val="6C5CE7"/>
+                </a:solidFill>
+              </a:rPr>
+              <a:t>The same routine a developer follows from a laptop – branch, commit, rebase, push, merge request – on a per-chat working copy, in the developer's name.</a:t>
+            </a:r>
           </a:p>
         </p:txBody>
       </p:sp>
